--- a/admin/public/nds/kit-digital/bergerie/nds_a4_bergerie-editable.pptx
+++ b/admin/public/nds/kit-digital/bergerie/nds_a4_bergerie-editable.pptx
@@ -870,7 +870,7 @@
       </p:grpSpPr>
       <p:pic>
         <p:nvPicPr>
-          <p:cNvPr id="2" name="Image 0" descr="/home/claude/pptx_work/plate_bergerie.png">    </p:cNvPr>
+          <p:cNvPr id="2" name="Image 0" descr="/home/claude/pptx_work/layers/bergerie__bg.png">    </p:cNvPr>
           <p:cNvPicPr>
             <a:picLocks noChangeAspect="1"/>
           </p:cNvPicPr>
@@ -892,15 +892,183 @@
           </a:prstGeom>
         </p:spPr>
       </p:pic>
-      <p:sp>
-        <p:nvSpPr>
-          <p:cNvPr id="3" name="Text 0"/>
+      <p:pic>
+        <p:nvPicPr>
+          <p:cNvPr id="3" name="Image 1" descr="/home/claude/pptx_work/layers/bergerie__logo_nds.png">    </p:cNvPr>
+          <p:cNvPicPr>
+            <a:picLocks noChangeAspect="1"/>
+          </p:cNvPicPr>
+          <p:nvPr/>
+        </p:nvPicPr>
+        <p:blipFill>
+          <a:blip r:embed="rId2"/>
+          <a:stretch>
+            <a:fillRect/>
+          </a:stretch>
+        </p:blipFill>
+        <p:spPr>
+          <a:xfrm>
+            <a:off x="2121408" y="966216"/>
+            <a:ext cx="3331464" cy="1060704"/>
+          </a:xfrm>
+          <a:prstGeom prst="rect">
+            <a:avLst/>
+          </a:prstGeom>
+        </p:spPr>
+      </p:pic>
+      <p:pic>
+        <p:nvPicPr>
+          <p:cNvPr id="4" name="Image 2" descr="/home/claude/pptx_work/layers/bergerie__banniere_flash.png">    </p:cNvPr>
+          <p:cNvPicPr>
+            <a:picLocks noChangeAspect="1"/>
+          </p:cNvPicPr>
+          <p:nvPr/>
+        </p:nvPicPr>
+        <p:blipFill>
+          <a:blip r:embed="rId3"/>
+          <a:stretch>
+            <a:fillRect/>
+          </a:stretch>
+        </p:blipFill>
+        <p:spPr>
+          <a:xfrm>
+            <a:off x="1749552" y="2045208"/>
+            <a:ext cx="4059936" cy="1380744"/>
+          </a:xfrm>
+          <a:prstGeom prst="rect">
+            <a:avLst/>
+          </a:prstGeom>
+        </p:spPr>
+      </p:pic>
+      <p:pic>
+        <p:nvPicPr>
+          <p:cNvPr id="5" name="Image 3" descr="/home/claude/pptx_work/layers/bergerie__logo_commerce.png">    </p:cNvPr>
+          <p:cNvPicPr>
+            <a:picLocks noChangeAspect="1"/>
+          </p:cNvPicPr>
+          <p:nvPr/>
+        </p:nvPicPr>
+        <p:blipFill>
+          <a:blip r:embed="rId4"/>
+          <a:stretch>
+            <a:fillRect/>
+          </a:stretch>
+        </p:blipFill>
+        <p:spPr>
+          <a:xfrm>
+            <a:off x="4337304" y="3163824"/>
+            <a:ext cx="1280160" cy="1280160"/>
+          </a:xfrm>
+          <a:prstGeom prst="rect">
+            <a:avLst/>
+          </a:prstGeom>
+        </p:spPr>
+      </p:pic>
+      <p:pic>
+        <p:nvPicPr>
+          <p:cNvPr id="6" name="Image 4" descr="/home/claude/pptx_work/layers/bergerie__ticket_concert.png">    </p:cNvPr>
+          <p:cNvPicPr>
+            <a:picLocks noChangeAspect="1"/>
+          </p:cNvPicPr>
+          <p:nvPr/>
+        </p:nvPicPr>
+        <p:blipFill>
+          <a:blip r:embed="rId5"/>
+          <a:stretch>
+            <a:fillRect/>
+          </a:stretch>
+        </p:blipFill>
+        <p:spPr>
+          <a:xfrm>
+            <a:off x="1146048" y="3880104"/>
+            <a:ext cx="2243328" cy="2243328"/>
+          </a:xfrm>
+          <a:prstGeom prst="rect">
+            <a:avLst/>
+          </a:prstGeom>
+        </p:spPr>
+      </p:pic>
+      <p:pic>
+        <p:nvPicPr>
+          <p:cNvPr id="7" name="Image 5" descr="/home/claude/pptx_work/layers/bergerie__ticket_bon.png">    </p:cNvPr>
+          <p:cNvPicPr>
+            <a:picLocks noChangeAspect="1"/>
+          </p:cNvPicPr>
+          <p:nvPr/>
+        </p:nvPicPr>
+        <p:blipFill>
+          <a:blip r:embed="rId6"/>
+          <a:stretch>
+            <a:fillRect/>
+          </a:stretch>
+        </p:blipFill>
+        <p:spPr>
+          <a:xfrm>
+            <a:off x="4169664" y="3880104"/>
+            <a:ext cx="2243328" cy="2243328"/>
+          </a:xfrm>
+          <a:prstGeom prst="rect">
+            <a:avLst/>
+          </a:prstGeom>
+        </p:spPr>
+      </p:pic>
+      <p:pic>
+        <p:nvPicPr>
+          <p:cNvPr id="8" name="Image 6" descr="/home/claude/pptx_work/layers/bergerie__qr.png">    </p:cNvPr>
+          <p:cNvPicPr>
+            <a:picLocks noChangeAspect="1"/>
+          </p:cNvPicPr>
+          <p:nvPr/>
+        </p:nvPicPr>
+        <p:blipFill>
+          <a:blip r:embed="rId7"/>
+          <a:stretch>
+            <a:fillRect/>
+          </a:stretch>
+        </p:blipFill>
+        <p:spPr>
+          <a:xfrm>
+            <a:off x="2255520" y="5553456"/>
+            <a:ext cx="3048000" cy="3048000"/>
+          </a:xfrm>
+          <a:prstGeom prst="rect">
+            <a:avLst/>
+          </a:prstGeom>
+        </p:spPr>
+      </p:pic>
+      <p:pic>
+        <p:nvPicPr>
+          <p:cNvPr id="9" name="Image 7" descr="/home/claude/pptx_work/layers/bergerie__banniere_tirage.png">    </p:cNvPr>
+          <p:cNvPicPr>
+            <a:picLocks noChangeAspect="1"/>
+          </p:cNvPicPr>
+          <p:nvPr/>
+        </p:nvPicPr>
+        <p:blipFill>
+          <a:blip r:embed="rId8"/>
+          <a:stretch>
+            <a:fillRect/>
+          </a:stretch>
+        </p:blipFill>
+        <p:spPr>
+          <a:xfrm>
+            <a:off x="1350264" y="9003792"/>
+            <a:ext cx="4855464" cy="810768"/>
+          </a:xfrm>
+          <a:prstGeom prst="rect">
+            <a:avLst/>
+          </a:prstGeom>
+        </p:spPr>
+      </p:pic>
+      <p:sp>
+        <p:nvSpPr>
+          <p:cNvPr id="10" name="Text 0"/>
           <p:cNvSpPr/>
           <p:nvPr/>
         </p:nvSpPr>
         <p:spPr>
           <a:xfrm>
-            <a:off x="0" y="447446"/>
+            <a:off x="0" y="445959"/>
             <a:ext cx="7559040" cy="476707"/>
           </a:xfrm>
           <a:prstGeom prst="rect">
@@ -910,9 +1078,7 @@
           <a:ln/>
         </p:spPr>
         <p:txBody>
-          <a:bodyPr wrap="none" lIns="0" tIns="0" rIns="0" bIns="0" rtlCol="0" anchor="ctr">
-            <a:normAutofit/>
-          </a:bodyPr>
+          <a:bodyPr wrap="none" lIns="0" tIns="0" rIns="0" bIns="0" rtlCol="0" anchor="ctr"/>
           <a:lstStyle/>
           <a:p>
             <a:pPr algn="ctr" indent="0" marL="0">
@@ -935,13 +1101,13 @@
       </p:sp>
       <p:sp>
         <p:nvSpPr>
-          <p:cNvPr id="4" name="Text 1"/>
+          <p:cNvPr id="11" name="Text 1"/>
           <p:cNvSpPr/>
           <p:nvPr/>
         </p:nvSpPr>
         <p:spPr>
           <a:xfrm>
-            <a:off x="0" y="2348484"/>
+            <a:off x="0" y="2348630"/>
             <a:ext cx="7559040" cy="777240"/>
           </a:xfrm>
           <a:prstGeom prst="rect">
@@ -951,9 +1117,7 @@
           <a:ln/>
         </p:spPr>
         <p:txBody>
-          <a:bodyPr wrap="none" lIns="0" tIns="0" rIns="0" bIns="0" rtlCol="0" anchor="ctr">
-            <a:normAutofit/>
-          </a:bodyPr>
+          <a:bodyPr wrap="none" lIns="0" tIns="0" rIns="0" bIns="0" rtlCol="0" anchor="ctr"/>
           <a:lstStyle/>
           <a:p>
             <a:pPr algn="ctr" indent="0" marL="0">
@@ -976,14 +1140,14 @@
       </p:sp>
       <p:sp>
         <p:nvSpPr>
-          <p:cNvPr id="5" name="Text 2"/>
+          <p:cNvPr id="12" name="Text 2"/>
           <p:cNvSpPr/>
           <p:nvPr/>
         </p:nvSpPr>
         <p:spPr>
           <a:xfrm>
-            <a:off x="0" y="3558235"/>
-            <a:ext cx="5181600" cy="497434"/>
+            <a:off x="0" y="3557772"/>
+            <a:ext cx="5184648" cy="497434"/>
           </a:xfrm>
           <a:prstGeom prst="rect">
             <a:avLst/>
@@ -992,9 +1156,7 @@
           <a:ln/>
         </p:spPr>
         <p:txBody>
-          <a:bodyPr wrap="none" lIns="0" tIns="0" rIns="0" bIns="0" rtlCol="0" anchor="ctr">
-            <a:normAutofit/>
-          </a:bodyPr>
+          <a:bodyPr wrap="none" lIns="0" tIns="0" rIns="0" bIns="0" rtlCol="0" anchor="ctr"/>
           <a:lstStyle/>
           <a:p>
             <a:pPr algn="ctr" indent="0" marL="0">
@@ -1017,13 +1179,13 @@
       </p:sp>
       <p:sp>
         <p:nvSpPr>
-          <p:cNvPr id="6" name="Text 3"/>
+          <p:cNvPr id="13" name="Text 3"/>
           <p:cNvSpPr/>
           <p:nvPr/>
         </p:nvSpPr>
         <p:spPr>
           <a:xfrm>
-            <a:off x="0" y="3558235"/>
+            <a:off x="0" y="3557772"/>
             <a:ext cx="7473696" cy="497434"/>
           </a:xfrm>
           <a:prstGeom prst="rect">
@@ -1033,9 +1195,7 @@
           <a:ln/>
         </p:spPr>
         <p:txBody>
-          <a:bodyPr wrap="none" lIns="0" tIns="0" rIns="0" bIns="0" rtlCol="0" anchor="ctr">
-            <a:normAutofit/>
-          </a:bodyPr>
+          <a:bodyPr wrap="none" lIns="0" tIns="0" rIns="0" bIns="0" rtlCol="0" anchor="ctr"/>
           <a:lstStyle/>
           <a:p>
             <a:pPr algn="ctr" indent="0" marL="0">
@@ -1058,13 +1218,13 @@
       </p:sp>
       <p:sp>
         <p:nvSpPr>
-          <p:cNvPr id="7" name="Text 4"/>
+          <p:cNvPr id="14" name="Text 4"/>
           <p:cNvSpPr/>
           <p:nvPr/>
         </p:nvSpPr>
         <p:spPr>
           <a:xfrm>
-            <a:off x="0" y="5622646"/>
+            <a:off x="0" y="5623621"/>
             <a:ext cx="4535424" cy="300533"/>
           </a:xfrm>
           <a:prstGeom prst="rect">
@@ -1074,9 +1234,7 @@
           <a:ln/>
         </p:spPr>
         <p:txBody>
-          <a:bodyPr wrap="none" lIns="0" tIns="0" rIns="0" bIns="0" rtlCol="0" anchor="ctr">
-            <a:normAutofit/>
-          </a:bodyPr>
+          <a:bodyPr wrap="none" lIns="0" tIns="0" rIns="0" bIns="0" rtlCol="0" anchor="ctr"/>
           <a:lstStyle/>
           <a:p>
             <a:pPr algn="ctr" indent="0" marL="0">
@@ -1099,13 +1257,13 @@
       </p:sp>
       <p:sp>
         <p:nvSpPr>
-          <p:cNvPr id="8" name="Text 5"/>
+          <p:cNvPr id="15" name="Text 5"/>
           <p:cNvSpPr/>
           <p:nvPr/>
         </p:nvSpPr>
         <p:spPr>
           <a:xfrm>
-            <a:off x="3023311" y="5622646"/>
+            <a:off x="3023311" y="5623621"/>
             <a:ext cx="4536034" cy="300533"/>
           </a:xfrm>
           <a:prstGeom prst="rect">
@@ -1115,9 +1273,7 @@
           <a:ln/>
         </p:spPr>
         <p:txBody>
-          <a:bodyPr wrap="none" lIns="0" tIns="0" rIns="0" bIns="0" rtlCol="0" anchor="ctr">
-            <a:normAutofit/>
-          </a:bodyPr>
+          <a:bodyPr wrap="none" lIns="0" tIns="0" rIns="0" bIns="0" rtlCol="0" anchor="ctr"/>
           <a:lstStyle/>
           <a:p>
             <a:pPr algn="ctr" indent="0" marL="0">
@@ -1140,13 +1296,13 @@
       </p:sp>
       <p:sp>
         <p:nvSpPr>
-          <p:cNvPr id="9" name="Text 6"/>
+          <p:cNvPr id="16" name="Text 6"/>
           <p:cNvSpPr/>
           <p:nvPr/>
         </p:nvSpPr>
         <p:spPr>
           <a:xfrm>
-            <a:off x="0" y="8362889"/>
+            <a:off x="0" y="8364303"/>
             <a:ext cx="7559040" cy="550286"/>
           </a:xfrm>
           <a:prstGeom prst="rect">
@@ -1156,9 +1312,7 @@
           <a:ln/>
         </p:spPr>
         <p:txBody>
-          <a:bodyPr wrap="none" lIns="0" tIns="0" rIns="0" bIns="0" rtlCol="0" anchor="ctr">
-            <a:normAutofit/>
-          </a:bodyPr>
+          <a:bodyPr wrap="none" lIns="0" tIns="0" rIns="0" bIns="0" rtlCol="0" anchor="ctr"/>
           <a:lstStyle/>
           <a:p>
             <a:pPr algn="ctr" indent="0" marL="0">
@@ -1181,13 +1335,13 @@
       </p:sp>
       <p:sp>
         <p:nvSpPr>
-          <p:cNvPr id="10" name="Text 7"/>
+          <p:cNvPr id="17" name="Text 7"/>
           <p:cNvSpPr/>
           <p:nvPr/>
         </p:nvSpPr>
         <p:spPr>
           <a:xfrm>
-            <a:off x="0" y="8868461"/>
+            <a:off x="0" y="8867193"/>
             <a:ext cx="7559040" cy="227990"/>
           </a:xfrm>
           <a:prstGeom prst="rect">
@@ -1197,9 +1351,7 @@
           <a:ln/>
         </p:spPr>
         <p:txBody>
-          <a:bodyPr wrap="none" lIns="0" tIns="0" rIns="0" bIns="0" rtlCol="0" anchor="ctr">
-            <a:normAutofit/>
-          </a:bodyPr>
+          <a:bodyPr wrap="none" lIns="0" tIns="0" rIns="0" bIns="0" rtlCol="0" anchor="ctr"/>
           <a:lstStyle/>
           <a:p>
             <a:pPr algn="ctr" indent="0" marL="0">
@@ -1222,14 +1374,14 @@
       </p:sp>
       <p:sp>
         <p:nvSpPr>
-          <p:cNvPr id="11" name="Text 8"/>
+          <p:cNvPr id="18" name="Text 8"/>
           <p:cNvSpPr/>
           <p:nvPr/>
         </p:nvSpPr>
         <p:spPr>
           <a:xfrm>
-            <a:off x="0" y="9744608"/>
-            <a:ext cx="7559040" cy="139903"/>
+            <a:off x="0" y="9253850"/>
+            <a:ext cx="7559040" cy="310896"/>
           </a:xfrm>
           <a:prstGeom prst="rect">
             <a:avLst/>
@@ -1238,9 +1390,46 @@
           <a:ln/>
         </p:spPr>
         <p:txBody>
-          <a:bodyPr wrap="none" lIns="0" tIns="0" rIns="0" bIns="0" rtlCol="0" anchor="ctr">
-            <a:normAutofit/>
-          </a:bodyPr>
+          <a:bodyPr wrap="none" lIns="0" tIns="0" rIns="0" bIns="0" rtlCol="0" anchor="ctr"/>
+          <a:lstStyle/>
+          <a:p>
+            <a:pPr algn="ctr" indent="0" marL="0">
+              <a:buNone/>
+            </a:pPr>
+            <a:r>
+              <a:rPr lang="en-US" sz="1440" b="1" dirty="0">
+                <a:solidFill>
+                  <a:srgbClr val="120E22"/>
+                </a:solidFill>
+                <a:latin typeface="Manrope" pitchFamily="34" charset="0"/>
+                <a:ea typeface="Manrope" pitchFamily="34" charset="-122"/>
+                <a:cs typeface="Manrope" pitchFamily="34" charset="-120"/>
+              </a:rPr>
+              <a:t>★  GRAND TIRAGE À LA CLÔTURE DU FESTIVAL</a:t>
+            </a:r>
+            <a:endParaRPr lang="en-US" sz="1440" dirty="0"/>
+          </a:p>
+        </p:txBody>
+      </p:sp>
+      <p:sp>
+        <p:nvSpPr>
+          <p:cNvPr id="19" name="Text 9"/>
+          <p:cNvSpPr/>
+          <p:nvPr/>
+        </p:nvSpPr>
+        <p:spPr>
+          <a:xfrm>
+            <a:off x="0" y="9745657"/>
+            <a:ext cx="7559040" cy="139903"/>
+          </a:xfrm>
+          <a:prstGeom prst="rect">
+            <a:avLst/>
+          </a:prstGeom>
+          <a:noFill/>
+          <a:ln/>
+        </p:spPr>
+        <p:txBody>
+          <a:bodyPr wrap="none" lIns="0" tIns="0" rIns="0" bIns="0" rtlCol="0" anchor="ctr"/>
           <a:lstStyle/>
           <a:p>
             <a:pPr algn="ctr" indent="0" marL="0">
@@ -1263,13 +1452,13 @@
       </p:sp>
       <p:sp>
         <p:nvSpPr>
-          <p:cNvPr id="12" name="Text 9"/>
+          <p:cNvPr id="20" name="Text 10"/>
           <p:cNvSpPr/>
           <p:nvPr/>
         </p:nvSpPr>
         <p:spPr>
           <a:xfrm>
-            <a:off x="0" y="10189464"/>
+            <a:off x="0" y="10188147"/>
             <a:ext cx="7559040" cy="207264"/>
           </a:xfrm>
           <a:prstGeom prst="rect">
@@ -1279,9 +1468,7 @@
           <a:ln/>
         </p:spPr>
         <p:txBody>
-          <a:bodyPr wrap="none" lIns="0" tIns="0" rIns="0" bIns="0" rtlCol="0" anchor="ctr">
-            <a:normAutofit/>
-          </a:bodyPr>
+          <a:bodyPr wrap="none" lIns="0" tIns="0" rIns="0" bIns="0" rtlCol="0" anchor="ctr"/>
           <a:lstStyle/>
           <a:p>
             <a:pPr algn="ctr" indent="0" marL="0">
